--- a/classes/parte-2-deep-learning/152-rag-basico-y-embeddings/clase-152-rag-basico-y-embeddings-presentacion.pptx
+++ b/classes/parte-2-deep-learning/152-rag-basico-y-embeddings/clase-152-rag-basico-y-embeddings-presentacion.pptx
@@ -4910,7 +4910,349 @@
                 </a:solidFill>
                 <a:latin typeface="Courier New"/>
               </a:rPr>
-              <a:t># Imports y configuración inicial</a:t>
+              <a:t>try:</a:t>
+            </a:r>
+          </a:p>
+          <a:p>
+            <a:pPr>
+              <a:defRPr sz="1200" b="0">
+                <a:solidFill>
+                  <a:srgbClr val="F8FAFC"/>
+                </a:solidFill>
+                <a:latin typeface="Courier New"/>
+              </a:defRPr>
+            </a:pPr>
+            <a:r>
+              <a:rPr sz="1200" b="0">
+                <a:solidFill>
+                  <a:srgbClr val="F8FAFC"/>
+                </a:solidFill>
+                <a:latin typeface="Courier New"/>
+              </a:rPr>
+              <a:t>    from sentence_transformers import SentenceTransformer</a:t>
+            </a:r>
+          </a:p>
+          <a:p>
+            <a:pPr>
+              <a:defRPr sz="1200" b="0">
+                <a:solidFill>
+                  <a:srgbClr val="F8FAFC"/>
+                </a:solidFill>
+                <a:latin typeface="Courier New"/>
+              </a:defRPr>
+            </a:pPr>
+            <a:r>
+              <a:rPr sz="1200" b="0">
+                <a:solidFill>
+                  <a:srgbClr val="F8FAFC"/>
+                </a:solidFill>
+                <a:latin typeface="Courier New"/>
+              </a:rPr>
+              <a:t>    HAS_ST = True</a:t>
+            </a:r>
+          </a:p>
+          <a:p>
+            <a:pPr>
+              <a:defRPr sz="1200" b="0">
+                <a:solidFill>
+                  <a:srgbClr val="F8FAFC"/>
+                </a:solidFill>
+                <a:latin typeface="Courier New"/>
+              </a:defRPr>
+            </a:pPr>
+            <a:r>
+              <a:rPr sz="1200" b="0">
+                <a:solidFill>
+                  <a:srgbClr val="F8FAFC"/>
+                </a:solidFill>
+                <a:latin typeface="Courier New"/>
+              </a:rPr>
+              <a:t>except Exception as e:</a:t>
+            </a:r>
+          </a:p>
+          <a:p>
+            <a:pPr>
+              <a:defRPr sz="1200" b="0">
+                <a:solidFill>
+                  <a:srgbClr val="F8FAFC"/>
+                </a:solidFill>
+                <a:latin typeface="Courier New"/>
+              </a:defRPr>
+            </a:pPr>
+            <a:r>
+              <a:rPr sz="1200" b="0">
+                <a:solidFill>
+                  <a:srgbClr val="F8FAFC"/>
+                </a:solidFill>
+                <a:latin typeface="Courier New"/>
+              </a:rPr>
+              <a:t>    HAS_ST = False</a:t>
+            </a:r>
+          </a:p>
+          <a:p>
+            <a:pPr>
+              <a:defRPr sz="1200" b="0">
+                <a:solidFill>
+                  <a:srgbClr val="F8FAFC"/>
+                </a:solidFill>
+                <a:latin typeface="Courier New"/>
+              </a:defRPr>
+            </a:pPr>
+            <a:r>
+              <a:rPr sz="1200" b="0">
+                <a:solidFill>
+                  <a:srgbClr val="F8FAFC"/>
+                </a:solidFill>
+                <a:latin typeface="Courier New"/>
+              </a:rPr>
+              <a:t>    print('sentence-transformers no instalado; uso embeddings bag-of-words. Motivo:', type(e).__name__)</a:t>
+            </a:r>
+          </a:p>
+          <a:p>
+            <a:pPr>
+              <a:defRPr sz="1200" b="0">
+                <a:solidFill>
+                  <a:srgbClr val="F8FAFC"/>
+                </a:solidFill>
+                <a:latin typeface="Courier New"/>
+              </a:defRPr>
+            </a:pPr>
+            <a:r>
+              <a:rPr sz="1200" b="0">
+                <a:solidFill>
+                  <a:srgbClr val="F8FAFC"/>
+                </a:solidFill>
+                <a:latin typeface="Courier New"/>
+              </a:rPr>
+              <a:t> </a:t>
+            </a:r>
+          </a:p>
+          <a:p>
+            <a:pPr>
+              <a:defRPr sz="1200" b="0">
+                <a:solidFill>
+                  <a:srgbClr val="F8FAFC"/>
+                </a:solidFill>
+                <a:latin typeface="Courier New"/>
+              </a:defRPr>
+            </a:pPr>
+            <a:r>
+              <a:rPr sz="1200" b="0">
+                <a:solidFill>
+                  <a:srgbClr val="F8FAFC"/>
+                </a:solidFill>
+                <a:latin typeface="Courier New"/>
+              </a:rPr>
+              <a:t>import numpy as np</a:t>
+            </a:r>
+          </a:p>
+          <a:p>
+            <a:pPr>
+              <a:defRPr sz="1200" b="0">
+                <a:solidFill>
+                  <a:srgbClr val="F8FAFC"/>
+                </a:solidFill>
+                <a:latin typeface="Courier New"/>
+              </a:defRPr>
+            </a:pPr>
+            <a:r>
+              <a:rPr sz="1200" b="0">
+                <a:solidFill>
+                  <a:srgbClr val="F8FAFC"/>
+                </a:solidFill>
+                <a:latin typeface="Courier New"/>
+              </a:rPr>
+              <a:t>np.random.seed(42)</a:t>
+            </a:r>
+          </a:p>
+          <a:p>
+            <a:pPr>
+              <a:defRPr sz="1200" b="0">
+                <a:solidFill>
+                  <a:srgbClr val="F8FAFC"/>
+                </a:solidFill>
+                <a:latin typeface="Courier New"/>
+              </a:defRPr>
+            </a:pPr>
+            <a:r>
+              <a:rPr sz="1200" b="0">
+                <a:solidFill>
+                  <a:srgbClr val="F8FAFC"/>
+                </a:solidFill>
+                <a:latin typeface="Courier New"/>
+              </a:rPr>
+              <a:t> </a:t>
+            </a:r>
+          </a:p>
+          <a:p>
+            <a:pPr>
+              <a:defRPr sz="1200" b="0">
+                <a:solidFill>
+                  <a:srgbClr val="F8FAFC"/>
+                </a:solidFill>
+                <a:latin typeface="Courier New"/>
+              </a:defRPr>
+            </a:pPr>
+            <a:r>
+              <a:rPr sz="1200" b="0">
+                <a:solidFill>
+                  <a:srgbClr val="F8FAFC"/>
+                </a:solidFill>
+                <a:latin typeface="Courier New"/>
+              </a:rPr>
+              <a:t>corpus = [</a:t>
+            </a:r>
+          </a:p>
+          <a:p>
+            <a:pPr>
+              <a:defRPr sz="1200" b="0">
+                <a:solidFill>
+                  <a:srgbClr val="F8FAFC"/>
+                </a:solidFill>
+                <a:latin typeface="Courier New"/>
+              </a:defRPr>
+            </a:pPr>
+            <a:r>
+              <a:rPr sz="1200" b="0">
+                <a:solidFill>
+                  <a:srgbClr val="F8FAFC"/>
+                </a:solidFill>
+                <a:latin typeface="Courier New"/>
+              </a:rPr>
+              <a:t>    'FAISS es una librería para búsqueda de vectores densos.',</a:t>
+            </a:r>
+          </a:p>
+          <a:p>
+            <a:pPr>
+              <a:defRPr sz="1200" b="0">
+                <a:solidFill>
+                  <a:srgbClr val="F8FAFC"/>
+                </a:solidFill>
+                <a:latin typeface="Courier New"/>
+              </a:defRPr>
+            </a:pPr>
+            <a:r>
+              <a:rPr sz="1200" b="0">
+                <a:solidFill>
+                  <a:srgbClr val="F8FAFC"/>
+                </a:solidFill>
+                <a:latin typeface="Courier New"/>
+              </a:rPr>
+              <a:t>    'BM25 es un método de recuperación disperso basado en frecuencias.',</a:t>
+            </a:r>
+          </a:p>
+          <a:p>
+            <a:pPr>
+              <a:defRPr sz="1200" b="0">
+                <a:solidFill>
+                  <a:srgbClr val="F8FAFC"/>
+                </a:solidFill>
+                <a:latin typeface="Courier New"/>
+              </a:defRPr>
+            </a:pPr>
+            <a:r>
+              <a:rPr sz="1200" b="0">
+                <a:solidFill>
+                  <a:srgbClr val="F8FAFC"/>
+                </a:solidFill>
+                <a:latin typeface="Courier New"/>
+              </a:rPr>
+              <a:t>    'Los embeddings mapean texto a vectores de dimensión fija.',</a:t>
+            </a:r>
+          </a:p>
+          <a:p>
+            <a:pPr>
+              <a:defRPr sz="1200" b="0">
+                <a:solidFill>
+                  <a:srgbClr val="F8FAFC"/>
+                </a:solidFill>
+                <a:latin typeface="Courier New"/>
+              </a:defRPr>
+            </a:pPr>
+            <a:r>
+              <a:rPr sz="1200" b="0">
+                <a:solidFill>
+                  <a:srgbClr val="F8FAFC"/>
+                </a:solidFill>
+                <a:latin typeface="Courier New"/>
+              </a:rPr>
+              <a:t>    'El re-ranking con cross-encoder mejora la precisión del top-k.',</a:t>
+            </a:r>
+          </a:p>
+          <a:p>
+            <a:pPr>
+              <a:defRPr sz="1200" b="0">
+                <a:solidFill>
+                  <a:srgbClr val="F8FAFC"/>
+                </a:solidFill>
+                <a:latin typeface="Courier New"/>
+              </a:defRPr>
+            </a:pPr>
+            <a:r>
+              <a:rPr sz="1200" b="0">
+                <a:solidFill>
+                  <a:srgbClr val="F8FAFC"/>
+                </a:solidFill>
+                <a:latin typeface="Courier New"/>
+              </a:rPr>
+              <a:t>    'Chroma y Qdrant son bases de datos vectoriales.',</a:t>
+            </a:r>
+          </a:p>
+          <a:p>
+            <a:pPr>
+              <a:defRPr sz="1200" b="0">
+                <a:solidFill>
+                  <a:srgbClr val="F8FAFC"/>
+                </a:solidFill>
+                <a:latin typeface="Courier New"/>
+              </a:defRPr>
+            </a:pPr>
+            <a:r>
+              <a:rPr sz="1200" b="0">
+                <a:solidFill>
+                  <a:srgbClr val="F8FAFC"/>
+                </a:solidFill>
+                <a:latin typeface="Courier New"/>
+              </a:rPr>
+              <a:t>    'Un LLM genera la respuesta a partir del contexto recuperado.',</a:t>
+            </a:r>
+          </a:p>
+          <a:p>
+            <a:pPr>
+              <a:defRPr sz="1200" b="0">
+                <a:solidFill>
+                  <a:srgbClr val="F8FAFC"/>
+                </a:solidFill>
+                <a:latin typeface="Courier New"/>
+              </a:defRPr>
+            </a:pPr>
+            <a:r>
+              <a:rPr sz="1200" b="0">
+                <a:solidFill>
+                  <a:srgbClr val="F8FAFC"/>
+                </a:solidFill>
+                <a:latin typeface="Courier New"/>
+              </a:rPr>
+              <a:t>]</a:t>
+            </a:r>
+          </a:p>
+          <a:p>
+            <a:pPr>
+              <a:defRPr sz="1200" b="0">
+                <a:solidFill>
+                  <a:srgbClr val="F8FAFC"/>
+                </a:solidFill>
+                <a:latin typeface="Courier New"/>
+              </a:defRPr>
+            </a:pPr>
+            <a:r>
+              <a:rPr sz="1200" b="0">
+                <a:solidFill>
+                  <a:srgbClr val="F8FAFC"/>
+                </a:solidFill>
+                <a:latin typeface="Courier New"/>
+              </a:rPr>
+              <a:t>print(f'{len(corpus)} documentos en el corpus')</a:t>
             </a:r>
           </a:p>
         </p:txBody>

--- a/classes/parte-2-deep-learning/152-rag-basico-y-embeddings/clase-152-rag-basico-y-embeddings-presentacion.pptx
+++ b/classes/parte-2-deep-learning/152-rag-basico-y-embeddings/clase-152-rag-basico-y-embeddings-presentacion.pptx
@@ -3272,7 +3272,7 @@
                 </a:solidFill>
                 <a:latin typeface="Segoe UI"/>
               </a:rPr>
-              <a:t>Parte: 2 — Deep Learning · Fuente: Lewis et al. (2020) RAG paper + LlamaIndex / LangChain docs + Anthropic MCP spec.  Duración estimada: 100 min.</a:t>
+              <a:t>Parte: 2 — Deep Learning · Fuente: Lewis et al. (2020) RAG paper + LlamaIndex / LangChain docs + Anthropic MCP spec.  Duración estimada: 100 min. · Nivel: Avanzado</a:t>
             </a:r>
           </a:p>
         </p:txBody>
@@ -3581,7 +3581,7 @@
                 </a:solidFill>
                 <a:latin typeface="Segoe UI"/>
               </a:rPr>
-              <a:t>Parte: 2 — Deep Learning · Fuente: Lewis et al. (2020) RAG paper + LlamaIndex / LangChain docs + Anthropic MCP spec.  Duración estimada: 100 min.</a:t>
+              <a:t>Parte: 2 — Deep Learning · Fuente: Lewis et al. (2020) RAG paper + LlamaIndex / LangChain docs + Anthropic MCP spec.  Duración estimada: 100 min. · Nivel: Avanzado</a:t>
             </a:r>
           </a:p>
         </p:txBody>
